--- a/docs/SentinelAI_Template_Filled.pptx
+++ b/docs/SentinelAI_Template_Filled.pptx
@@ -144,7 +144,7 @@
   <pc:docChgLst>
     <pc:chgData name="Sujoy Sen" userId="b1a05dcc15492f82" providerId="LiveId" clId="{E7C8048A-1F0E-4894-BA27-0459C03B3F11}"/>
     <pc:docChg chg="undo custSel modSld">
-      <pc:chgData name="Sujoy Sen" userId="b1a05dcc15492f82" providerId="LiveId" clId="{E7C8048A-1F0E-4894-BA27-0459C03B3F11}" dt="2026-07-26T12:47:13.754" v="320" actId="20577"/>
+      <pc:chgData name="Sujoy Sen" userId="b1a05dcc15492f82" providerId="LiveId" clId="{E7C8048A-1F0E-4894-BA27-0459C03B3F11}" dt="2026-07-26T13:34:45.636" v="322" actId="1076"/>
       <pc:docMkLst>
         <pc:docMk/>
       </pc:docMkLst>
@@ -273,7 +273,7 @@
         </pc:spChg>
       </pc:sldChg>
       <pc:sldChg chg="addSp delSp modSp mod">
-        <pc:chgData name="Sujoy Sen" userId="b1a05dcc15492f82" providerId="LiveId" clId="{E7C8048A-1F0E-4894-BA27-0459C03B3F11}" dt="2026-07-26T12:25:06.228" v="124" actId="20577"/>
+        <pc:chgData name="Sujoy Sen" userId="b1a05dcc15492f82" providerId="LiveId" clId="{E7C8048A-1F0E-4894-BA27-0459C03B3F11}" dt="2026-07-26T13:34:45.636" v="322" actId="1076"/>
         <pc:sldMkLst>
           <pc:docMk/>
           <pc:sldMk cId="3319884780" sldId="298"/>
@@ -287,7 +287,7 @@
           </ac:spMkLst>
         </pc:spChg>
         <pc:spChg chg="mod">
-          <ac:chgData name="Sujoy Sen" userId="b1a05dcc15492f82" providerId="LiveId" clId="{E7C8048A-1F0E-4894-BA27-0459C03B3F11}" dt="2026-07-26T12:25:06.228" v="124" actId="20577"/>
+          <ac:chgData name="Sujoy Sen" userId="b1a05dcc15492f82" providerId="LiveId" clId="{E7C8048A-1F0E-4894-BA27-0459C03B3F11}" dt="2026-07-26T13:34:38.221" v="321" actId="20577"/>
           <ac:spMkLst>
             <pc:docMk/>
             <pc:sldMk cId="3319884780" sldId="298"/>
@@ -295,7 +295,7 @@
           </ac:spMkLst>
         </pc:spChg>
         <pc:picChg chg="add mod">
-          <ac:chgData name="Sujoy Sen" userId="b1a05dcc15492f82" providerId="LiveId" clId="{E7C8048A-1F0E-4894-BA27-0459C03B3F11}" dt="2026-07-26T06:11:33.265" v="29" actId="1036"/>
+          <ac:chgData name="Sujoy Sen" userId="b1a05dcc15492f82" providerId="LiveId" clId="{E7C8048A-1F0E-4894-BA27-0459C03B3F11}" dt="2026-07-26T13:34:45.636" v="322" actId="1076"/>
           <ac:picMkLst>
             <pc:docMk/>
             <pc:sldMk cId="3319884780" sldId="298"/>
@@ -8066,7 +8066,7 @@
         <p:spPr>
           <a:xfrm>
             <a:off x="397273" y="1187994"/>
-            <a:ext cx="10182237" cy="1754326"/>
+            <a:ext cx="10182237" cy="1477328"/>
           </a:xfrm>
           <a:prstGeom prst="rect">
             <a:avLst/>
@@ -8125,16 +8125,6 @@
           </a:p>
           <a:p>
             <a:endParaRPr dirty="0"/>
-          </a:p>
-          <a:p>
-            <a:r>
-              <a:rPr b="1" dirty="0"/>
-              <a:t>Live Demo</a:t>
-            </a:r>
-            <a:r>
-              <a:rPr dirty="0"/>
-              <a:t>: &lt;Add URL&gt;</a:t>
-            </a:r>
           </a:p>
         </p:txBody>
       </p:sp>
@@ -8190,7 +8180,7 @@
         </p:blipFill>
         <p:spPr>
           <a:xfrm>
-            <a:off x="2590416" y="3500282"/>
+            <a:off x="3082029" y="2910346"/>
             <a:ext cx="6027942" cy="2276189"/>
           </a:xfrm>
           <a:prstGeom prst="rect">
